--- a/docs/pptx/entire/ritu-entire-ratio-by-age80.pptx
+++ b/docs/pptx/entire/ritu-entire-ratio-by-age80.pptx
@@ -2400,7 +2400,7 @@
           </p:nvSpPr>
           <p:spPr>
             <a:xfrm>
-              <a:off x="1087269" y="3079375"/>
+              <a:off x="1087269" y="3079376"/>
               <a:ext cx="7523614" cy="0"/>
             </a:xfrm>
             <a:custGeom>
@@ -2744,7 +2744,7 @@
           </p:nvSpPr>
           <p:spPr>
             <a:xfrm>
-              <a:off x="1087269" y="2726768"/>
+              <a:off x="1087269" y="2726769"/>
               <a:ext cx="7523614" cy="0"/>
             </a:xfrm>
             <a:custGeom>
@@ -2933,10 +2933,10 @@
                     <a:pt x="26769" y="2530830"/>
                   </a:lnTo>
                   <a:lnTo>
-                    <a:pt x="40154" y="2529882"/>
-                  </a:lnTo>
-                  <a:lnTo>
-                    <a:pt x="53539" y="2528904"/>
+                    <a:pt x="40154" y="2529881"/>
+                  </a:lnTo>
+                  <a:lnTo>
+                    <a:pt x="53539" y="2528903"/>
                   </a:lnTo>
                   <a:lnTo>
                     <a:pt x="66924" y="2527864"/>
@@ -3008,10 +3008,10 @@
                     <a:pt x="361390" y="2493381"/>
                   </a:lnTo>
                   <a:lnTo>
-                    <a:pt x="374775" y="2491252"/>
-                  </a:lnTo>
-                  <a:lnTo>
-                    <a:pt x="388160" y="2489090"/>
+                    <a:pt x="374775" y="2491251"/>
+                  </a:lnTo>
+                  <a:lnTo>
+                    <a:pt x="388160" y="2489089"/>
                   </a:lnTo>
                   <a:lnTo>
                     <a:pt x="401544" y="2486888"/>
@@ -3029,7 +3029,7 @@
                     <a:pt x="455084" y="2477598"/>
                   </a:lnTo>
                   <a:lnTo>
-                    <a:pt x="468469" y="2475175"/>
+                    <a:pt x="468469" y="2475174"/>
                   </a:lnTo>
                   <a:lnTo>
                     <a:pt x="481853" y="2472704"/>
@@ -3053,7 +3053,7 @@
                     <a:pt x="562162" y="2457002"/>
                   </a:lnTo>
                   <a:lnTo>
-                    <a:pt x="575547" y="2454239"/>
+                    <a:pt x="575547" y="2454238"/>
                   </a:lnTo>
                   <a:lnTo>
                     <a:pt x="588932" y="2451446"/>
@@ -3077,28 +3077,28 @@
                     <a:pt x="669241" y="2433713"/>
                   </a:lnTo>
                   <a:lnTo>
-                    <a:pt x="682626" y="2430585"/>
-                  </a:lnTo>
-                  <a:lnTo>
-                    <a:pt x="696011" y="2427420"/>
+                    <a:pt x="682626" y="2430584"/>
+                  </a:lnTo>
+                  <a:lnTo>
+                    <a:pt x="696011" y="2427419"/>
                   </a:lnTo>
                   <a:lnTo>
                     <a:pt x="709396" y="2424203"/>
                   </a:lnTo>
                   <a:lnTo>
-                    <a:pt x="722780" y="2420917"/>
-                  </a:lnTo>
-                  <a:lnTo>
-                    <a:pt x="736165" y="2417589"/>
-                  </a:lnTo>
-                  <a:lnTo>
-                    <a:pt x="749550" y="2414195"/>
+                    <a:pt x="722780" y="2420916"/>
+                  </a:lnTo>
+                  <a:lnTo>
+                    <a:pt x="736165" y="2417588"/>
+                  </a:lnTo>
+                  <a:lnTo>
+                    <a:pt x="749550" y="2414194"/>
                   </a:lnTo>
                   <a:lnTo>
                     <a:pt x="762935" y="2410726"/>
                   </a:lnTo>
                   <a:lnTo>
-                    <a:pt x="776320" y="2407211"/>
+                    <a:pt x="776320" y="2407210"/>
                   </a:lnTo>
                   <a:lnTo>
                     <a:pt x="789705" y="2403609"/>
@@ -3116,13 +3116,13 @@
                     <a:pt x="843244" y="2388416"/>
                   </a:lnTo>
                   <a:lnTo>
-                    <a:pt x="856629" y="2384422"/>
+                    <a:pt x="856629" y="2384421"/>
                   </a:lnTo>
                   <a:lnTo>
                     <a:pt x="870014" y="2380283"/>
                   </a:lnTo>
                   <a:lnTo>
-                    <a:pt x="883398" y="2376060"/>
+                    <a:pt x="883398" y="2376059"/>
                   </a:lnTo>
                   <a:lnTo>
                     <a:pt x="896783" y="2371756"/>
@@ -3197,7 +3197,7 @@
                     <a:pt x="1204634" y="2226384"/>
                   </a:lnTo>
                   <a:lnTo>
-                    <a:pt x="1218019" y="2217356"/>
+                    <a:pt x="1218019" y="2217355"/>
                   </a:lnTo>
                   <a:lnTo>
                     <a:pt x="1231404" y="2208136"/>
@@ -3209,7 +3209,7 @@
                     <a:pt x="1258174" y="2188817"/>
                   </a:lnTo>
                   <a:lnTo>
-                    <a:pt x="1271559" y="2178788"/>
+                    <a:pt x="1271559" y="2178787"/>
                   </a:lnTo>
                   <a:lnTo>
                     <a:pt x="1284943" y="2168450"/>
@@ -3233,7 +3233,7 @@
                     <a:pt x="1365252" y="2100471"/>
                   </a:lnTo>
                   <a:lnTo>
-                    <a:pt x="1378637" y="2088149"/>
+                    <a:pt x="1378637" y="2088148"/>
                   </a:lnTo>
                   <a:lnTo>
                     <a:pt x="1392022" y="2075629"/>
@@ -3242,13 +3242,13 @@
                     <a:pt x="1405407" y="2062709"/>
                   </a:lnTo>
                   <a:lnTo>
-                    <a:pt x="1418792" y="2049578"/>
+                    <a:pt x="1418792" y="2049577"/>
                   </a:lnTo>
                   <a:lnTo>
                     <a:pt x="1432177" y="2036244"/>
                   </a:lnTo>
                   <a:lnTo>
-                    <a:pt x="1445561" y="2022519"/>
+                    <a:pt x="1445561" y="2022518"/>
                   </a:lnTo>
                   <a:lnTo>
                     <a:pt x="1458946" y="2008613"/>
@@ -3275,13 +3275,13 @@
                     <a:pt x="1552640" y="1904551"/>
                   </a:lnTo>
                   <a:lnTo>
-                    <a:pt x="1566025" y="1888796"/>
+                    <a:pt x="1566025" y="1888795"/>
                   </a:lnTo>
                   <a:lnTo>
                     <a:pt x="1579410" y="1872904"/>
                   </a:lnTo>
                   <a:lnTo>
-                    <a:pt x="1592795" y="1856789"/>
+                    <a:pt x="1592795" y="1856788"/>
                   </a:lnTo>
                   <a:lnTo>
                     <a:pt x="1606179" y="1840501"/>
@@ -3332,7 +3332,7 @@
                     <a:pt x="1806952" y="1583028"/>
                   </a:lnTo>
                   <a:lnTo>
-                    <a:pt x="1820337" y="1565467"/>
+                    <a:pt x="1820337" y="1565466"/>
                   </a:lnTo>
                   <a:lnTo>
                     <a:pt x="1833722" y="1547923"/>
@@ -3344,7 +3344,7 @@
                     <a:pt x="1860491" y="1512909"/>
                   </a:lnTo>
                   <a:lnTo>
-                    <a:pt x="1873876" y="1495472"/>
+                    <a:pt x="1873876" y="1495471"/>
                   </a:lnTo>
                   <a:lnTo>
                     <a:pt x="1887261" y="1478071"/>
@@ -3404,7 +3404,7 @@
                     <a:pt x="2128188" y="1185136"/>
                   </a:lnTo>
                   <a:lnTo>
-                    <a:pt x="2141573" y="1170510"/>
+                    <a:pt x="2141573" y="1170509"/>
                   </a:lnTo>
                   <a:lnTo>
                     <a:pt x="2154958" y="1156036"/>
@@ -3542,7 +3542,7 @@
                     <a:pt x="2743890" y="722021"/>
                   </a:lnTo>
                   <a:lnTo>
-                    <a:pt x="2757275" y="713823"/>
+                    <a:pt x="2757275" y="713822"/>
                   </a:lnTo>
                   <a:lnTo>
                     <a:pt x="2770660" y="705518"/>
@@ -3602,7 +3602,7 @@
                     <a:pt x="3011587" y="517213"/>
                   </a:lnTo>
                   <a:lnTo>
-                    <a:pt x="3024972" y="504301"/>
+                    <a:pt x="3024972" y="504300"/>
                   </a:lnTo>
                   <a:lnTo>
                     <a:pt x="3038357" y="491197"/>
@@ -3788,7 +3788,7 @@
                     <a:pt x="3841447" y="75040"/>
                   </a:lnTo>
                   <a:lnTo>
-                    <a:pt x="3854831" y="85357"/>
+                    <a:pt x="3854831" y="85356"/>
                   </a:lnTo>
                   <a:lnTo>
                     <a:pt x="3868216" y="96061"/>
@@ -3980,7 +3980,7 @@
                     <a:pt x="4698076" y="1065165"/>
                   </a:lnTo>
                   <a:lnTo>
-                    <a:pt x="4711461" y="1079860"/>
+                    <a:pt x="4711461" y="1079859"/>
                   </a:lnTo>
                   <a:lnTo>
                     <a:pt x="4724846" y="1094560"/>
@@ -4019,7 +4019,7 @@
                     <a:pt x="4872079" y="1258141"/>
                   </a:lnTo>
                   <a:lnTo>
-                    <a:pt x="4885464" y="1273273"/>
+                    <a:pt x="4885464" y="1273272"/>
                   </a:lnTo>
                   <a:lnTo>
                     <a:pt x="4898848" y="1288439"/>
@@ -4037,7 +4037,7 @@
                     <a:pt x="4952388" y="1349543"/>
                   </a:lnTo>
                   <a:lnTo>
-                    <a:pt x="4965773" y="1364930"/>
+                    <a:pt x="4965773" y="1364929"/>
                   </a:lnTo>
                   <a:lnTo>
                     <a:pt x="4979157" y="1380339"/>
@@ -4109,7 +4109,7 @@
                     <a:pt x="5273624" y="1716631"/>
                   </a:lnTo>
                   <a:lnTo>
-                    <a:pt x="5287009" y="1731159"/>
+                    <a:pt x="5287009" y="1731158"/>
                   </a:lnTo>
                   <a:lnTo>
                     <a:pt x="5300393" y="1745544"/>
@@ -4121,7 +4121,7 @@
                     <a:pt x="5327163" y="1773918"/>
                   </a:lnTo>
                   <a:lnTo>
-                    <a:pt x="5340548" y="1787874"/>
+                    <a:pt x="5340548" y="1787873"/>
                   </a:lnTo>
                   <a:lnTo>
                     <a:pt x="5353933" y="1801677"/>
@@ -4163,7 +4163,7 @@
                     <a:pt x="5514551" y="1953901"/>
                   </a:lnTo>
                   <a:lnTo>
-                    <a:pt x="5527936" y="1965357"/>
+                    <a:pt x="5527936" y="1965356"/>
                   </a:lnTo>
                   <a:lnTo>
                     <a:pt x="5541320" y="1976564"/>
@@ -4172,7 +4172,7 @@
                     <a:pt x="5554705" y="1987627"/>
                   </a:lnTo>
                   <a:lnTo>
-                    <a:pt x="5568090" y="1998458"/>
+                    <a:pt x="5568090" y="1998457"/>
                   </a:lnTo>
                   <a:lnTo>
                     <a:pt x="5581475" y="2009061"/>
@@ -4181,7 +4181,7 @@
                     <a:pt x="5594860" y="2019518"/>
                   </a:lnTo>
                   <a:lnTo>
-                    <a:pt x="5608245" y="2029717"/>
+                    <a:pt x="5608245" y="2029716"/>
                   </a:lnTo>
                   <a:lnTo>
                     <a:pt x="5621629" y="2039712"/>
@@ -4280,10 +4280,10 @@
                     <a:pt x="6036559" y="2257144"/>
                   </a:lnTo>
                   <a:lnTo>
-                    <a:pt x="6049944" y="2261607"/>
-                  </a:lnTo>
-                  <a:lnTo>
-                    <a:pt x="6063329" y="2265936"/>
+                    <a:pt x="6049944" y="2261606"/>
+                  </a:lnTo>
+                  <a:lnTo>
+                    <a:pt x="6063329" y="2265935"/>
                   </a:lnTo>
                   <a:lnTo>
                     <a:pt x="6076714" y="2270111"/>
@@ -4298,28 +4298,28 @@
                     <a:pt x="6116868" y="2281971"/>
                   </a:lnTo>
                   <a:lnTo>
-                    <a:pt x="6130253" y="2285712"/>
+                    <a:pt x="6130253" y="2285711"/>
                   </a:lnTo>
                   <a:lnTo>
                     <a:pt x="6143638" y="2289310"/>
                   </a:lnTo>
                   <a:lnTo>
-                    <a:pt x="6157023" y="2292804"/>
+                    <a:pt x="6157023" y="2292803"/>
                   </a:lnTo>
                   <a:lnTo>
                     <a:pt x="6170408" y="2296221"/>
                   </a:lnTo>
                   <a:lnTo>
-                    <a:pt x="6183792" y="2299497"/>
+                    <a:pt x="6183792" y="2299496"/>
                   </a:lnTo>
                   <a:lnTo>
                     <a:pt x="6197177" y="2302687"/>
                   </a:lnTo>
                   <a:lnTo>
-                    <a:pt x="6210562" y="2305808"/>
-                  </a:lnTo>
-                  <a:lnTo>
-                    <a:pt x="6223947" y="2308788"/>
+                    <a:pt x="6210562" y="2305807"/>
+                  </a:lnTo>
+                  <a:lnTo>
+                    <a:pt x="6223947" y="2308787"/>
                   </a:lnTo>
                   <a:lnTo>
                     <a:pt x="6237332" y="2311701"/>
@@ -4406,13 +4406,13 @@
                     <a:pt x="6598722" y="2367307"/>
                   </a:lnTo>
                   <a:lnTo>
-                    <a:pt x="6612107" y="2368936"/>
+                    <a:pt x="6612107" y="2368935"/>
                   </a:lnTo>
                   <a:lnTo>
                     <a:pt x="6625492" y="2370563"/>
                   </a:lnTo>
                   <a:lnTo>
-                    <a:pt x="6638877" y="2372192"/>
+                    <a:pt x="6638877" y="2372191"/>
                   </a:lnTo>
                   <a:lnTo>
                     <a:pt x="6652262" y="2373825"/>
@@ -4436,10 +4436,10 @@
                     <a:pt x="6732571" y="2383834"/>
                   </a:lnTo>
                   <a:lnTo>
-                    <a:pt x="6745955" y="2385553"/>
-                  </a:lnTo>
-                  <a:lnTo>
-                    <a:pt x="6759340" y="2387303"/>
+                    <a:pt x="6745955" y="2385552"/>
+                  </a:lnTo>
+                  <a:lnTo>
+                    <a:pt x="6759340" y="2387302"/>
                   </a:lnTo>
                   <a:lnTo>
                     <a:pt x="6772725" y="2389070"/>
@@ -4448,7 +4448,7 @@
                     <a:pt x="6786110" y="2390855"/>
                   </a:lnTo>
                   <a:lnTo>
-                    <a:pt x="6799495" y="2392678"/>
+                    <a:pt x="6799495" y="2392677"/>
                   </a:lnTo>
                   <a:lnTo>
                     <a:pt x="6812880" y="2394519"/>
@@ -6036,10 +6036,10 @@
                     <a:pt x="26769" y="2530830"/>
                   </a:lnTo>
                   <a:lnTo>
-                    <a:pt x="40154" y="2529882"/>
-                  </a:lnTo>
-                  <a:lnTo>
-                    <a:pt x="53539" y="2528904"/>
+                    <a:pt x="40154" y="2529881"/>
+                  </a:lnTo>
+                  <a:lnTo>
+                    <a:pt x="53539" y="2528903"/>
                   </a:lnTo>
                   <a:lnTo>
                     <a:pt x="66924" y="2527864"/>
@@ -6111,10 +6111,10 @@
                     <a:pt x="361390" y="2493381"/>
                   </a:lnTo>
                   <a:lnTo>
-                    <a:pt x="374775" y="2491252"/>
-                  </a:lnTo>
-                  <a:lnTo>
-                    <a:pt x="388160" y="2489090"/>
+                    <a:pt x="374775" y="2491251"/>
+                  </a:lnTo>
+                  <a:lnTo>
+                    <a:pt x="388160" y="2489089"/>
                   </a:lnTo>
                   <a:lnTo>
                     <a:pt x="401544" y="2486888"/>
@@ -6132,7 +6132,7 @@
                     <a:pt x="455084" y="2477598"/>
                   </a:lnTo>
                   <a:lnTo>
-                    <a:pt x="468469" y="2475175"/>
+                    <a:pt x="468469" y="2475174"/>
                   </a:lnTo>
                   <a:lnTo>
                     <a:pt x="481853" y="2472704"/>
@@ -6156,7 +6156,7 @@
                     <a:pt x="562162" y="2457002"/>
                   </a:lnTo>
                   <a:lnTo>
-                    <a:pt x="575547" y="2454239"/>
+                    <a:pt x="575547" y="2454238"/>
                   </a:lnTo>
                   <a:lnTo>
                     <a:pt x="588932" y="2451446"/>
@@ -6180,28 +6180,28 @@
                     <a:pt x="669241" y="2433713"/>
                   </a:lnTo>
                   <a:lnTo>
-                    <a:pt x="682626" y="2430585"/>
-                  </a:lnTo>
-                  <a:lnTo>
-                    <a:pt x="696011" y="2427420"/>
+                    <a:pt x="682626" y="2430584"/>
+                  </a:lnTo>
+                  <a:lnTo>
+                    <a:pt x="696011" y="2427419"/>
                   </a:lnTo>
                   <a:lnTo>
                     <a:pt x="709396" y="2424203"/>
                   </a:lnTo>
                   <a:lnTo>
-                    <a:pt x="722780" y="2420917"/>
-                  </a:lnTo>
-                  <a:lnTo>
-                    <a:pt x="736165" y="2417589"/>
-                  </a:lnTo>
-                  <a:lnTo>
-                    <a:pt x="749550" y="2414195"/>
+                    <a:pt x="722780" y="2420916"/>
+                  </a:lnTo>
+                  <a:lnTo>
+                    <a:pt x="736165" y="2417588"/>
+                  </a:lnTo>
+                  <a:lnTo>
+                    <a:pt x="749550" y="2414194"/>
                   </a:lnTo>
                   <a:lnTo>
                     <a:pt x="762935" y="2410726"/>
                   </a:lnTo>
                   <a:lnTo>
-                    <a:pt x="776320" y="2407211"/>
+                    <a:pt x="776320" y="2407210"/>
                   </a:lnTo>
                   <a:lnTo>
                     <a:pt x="789705" y="2403609"/>
@@ -6219,13 +6219,13 @@
                     <a:pt x="843244" y="2388416"/>
                   </a:lnTo>
                   <a:lnTo>
-                    <a:pt x="856629" y="2384422"/>
+                    <a:pt x="856629" y="2384421"/>
                   </a:lnTo>
                   <a:lnTo>
                     <a:pt x="870014" y="2380283"/>
                   </a:lnTo>
                   <a:lnTo>
-                    <a:pt x="883398" y="2376060"/>
+                    <a:pt x="883398" y="2376059"/>
                   </a:lnTo>
                   <a:lnTo>
                     <a:pt x="896783" y="2371756"/>
@@ -6300,7 +6300,7 @@
                     <a:pt x="1204634" y="2226384"/>
                   </a:lnTo>
                   <a:lnTo>
-                    <a:pt x="1218019" y="2217356"/>
+                    <a:pt x="1218019" y="2217355"/>
                   </a:lnTo>
                   <a:lnTo>
                     <a:pt x="1231404" y="2208136"/>
@@ -6312,7 +6312,7 @@
                     <a:pt x="1258174" y="2188817"/>
                   </a:lnTo>
                   <a:lnTo>
-                    <a:pt x="1271559" y="2178788"/>
+                    <a:pt x="1271559" y="2178787"/>
                   </a:lnTo>
                   <a:lnTo>
                     <a:pt x="1284943" y="2168450"/>
@@ -6336,7 +6336,7 @@
                     <a:pt x="1365252" y="2100471"/>
                   </a:lnTo>
                   <a:lnTo>
-                    <a:pt x="1378637" y="2088149"/>
+                    <a:pt x="1378637" y="2088148"/>
                   </a:lnTo>
                   <a:lnTo>
                     <a:pt x="1392022" y="2075629"/>
@@ -6345,13 +6345,13 @@
                     <a:pt x="1405407" y="2062709"/>
                   </a:lnTo>
                   <a:lnTo>
-                    <a:pt x="1418792" y="2049578"/>
+                    <a:pt x="1418792" y="2049577"/>
                   </a:lnTo>
                   <a:lnTo>
                     <a:pt x="1432177" y="2036244"/>
                   </a:lnTo>
                   <a:lnTo>
-                    <a:pt x="1445561" y="2022519"/>
+                    <a:pt x="1445561" y="2022518"/>
                   </a:lnTo>
                   <a:lnTo>
                     <a:pt x="1458946" y="2008613"/>
@@ -6378,13 +6378,13 @@
                     <a:pt x="1552640" y="1904551"/>
                   </a:lnTo>
                   <a:lnTo>
-                    <a:pt x="1566025" y="1888796"/>
+                    <a:pt x="1566025" y="1888795"/>
                   </a:lnTo>
                   <a:lnTo>
                     <a:pt x="1579410" y="1872904"/>
                   </a:lnTo>
                   <a:lnTo>
-                    <a:pt x="1592795" y="1856789"/>
+                    <a:pt x="1592795" y="1856788"/>
                   </a:lnTo>
                   <a:lnTo>
                     <a:pt x="1606179" y="1840501"/>
@@ -6435,7 +6435,7 @@
                     <a:pt x="1806952" y="1583028"/>
                   </a:lnTo>
                   <a:lnTo>
-                    <a:pt x="1820337" y="1565467"/>
+                    <a:pt x="1820337" y="1565466"/>
                   </a:lnTo>
                   <a:lnTo>
                     <a:pt x="1833722" y="1547923"/>
@@ -6447,7 +6447,7 @@
                     <a:pt x="1860491" y="1512909"/>
                   </a:lnTo>
                   <a:lnTo>
-                    <a:pt x="1873876" y="1495472"/>
+                    <a:pt x="1873876" y="1495471"/>
                   </a:lnTo>
                   <a:lnTo>
                     <a:pt x="1887261" y="1478071"/>
@@ -6507,7 +6507,7 @@
                     <a:pt x="2128188" y="1185136"/>
                   </a:lnTo>
                   <a:lnTo>
-                    <a:pt x="2141573" y="1170510"/>
+                    <a:pt x="2141573" y="1170509"/>
                   </a:lnTo>
                   <a:lnTo>
                     <a:pt x="2154958" y="1156036"/>
@@ -6645,7 +6645,7 @@
                     <a:pt x="2743890" y="722021"/>
                   </a:lnTo>
                   <a:lnTo>
-                    <a:pt x="2757275" y="713823"/>
+                    <a:pt x="2757275" y="713822"/>
                   </a:lnTo>
                   <a:lnTo>
                     <a:pt x="2770660" y="705518"/>
@@ -6705,7 +6705,7 @@
                     <a:pt x="3011587" y="517213"/>
                   </a:lnTo>
                   <a:lnTo>
-                    <a:pt x="3024972" y="504301"/>
+                    <a:pt x="3024972" y="504300"/>
                   </a:lnTo>
                   <a:lnTo>
                     <a:pt x="3038357" y="491197"/>
@@ -6891,7 +6891,7 @@
                     <a:pt x="3841447" y="75040"/>
                   </a:lnTo>
                   <a:lnTo>
-                    <a:pt x="3854831" y="85357"/>
+                    <a:pt x="3854831" y="85356"/>
                   </a:lnTo>
                   <a:lnTo>
                     <a:pt x="3868216" y="96061"/>
@@ -7083,7 +7083,7 @@
                     <a:pt x="4698076" y="1065165"/>
                   </a:lnTo>
                   <a:lnTo>
-                    <a:pt x="4711461" y="1079860"/>
+                    <a:pt x="4711461" y="1079859"/>
                   </a:lnTo>
                   <a:lnTo>
                     <a:pt x="4724846" y="1094560"/>
@@ -7122,7 +7122,7 @@
                     <a:pt x="4872079" y="1258141"/>
                   </a:lnTo>
                   <a:lnTo>
-                    <a:pt x="4885464" y="1273273"/>
+                    <a:pt x="4885464" y="1273272"/>
                   </a:lnTo>
                   <a:lnTo>
                     <a:pt x="4898848" y="1288439"/>
@@ -7140,7 +7140,7 @@
                     <a:pt x="4952388" y="1349543"/>
                   </a:lnTo>
                   <a:lnTo>
-                    <a:pt x="4965773" y="1364930"/>
+                    <a:pt x="4965773" y="1364929"/>
                   </a:lnTo>
                   <a:lnTo>
                     <a:pt x="4979157" y="1380339"/>
@@ -7212,7 +7212,7 @@
                     <a:pt x="5273624" y="1716631"/>
                   </a:lnTo>
                   <a:lnTo>
-                    <a:pt x="5287009" y="1731159"/>
+                    <a:pt x="5287009" y="1731158"/>
                   </a:lnTo>
                   <a:lnTo>
                     <a:pt x="5300393" y="1745544"/>
@@ -7224,7 +7224,7 @@
                     <a:pt x="5327163" y="1773918"/>
                   </a:lnTo>
                   <a:lnTo>
-                    <a:pt x="5340548" y="1787874"/>
+                    <a:pt x="5340548" y="1787873"/>
                   </a:lnTo>
                   <a:lnTo>
                     <a:pt x="5353933" y="1801677"/>
@@ -7266,7 +7266,7 @@
                     <a:pt x="5514551" y="1953901"/>
                   </a:lnTo>
                   <a:lnTo>
-                    <a:pt x="5527936" y="1965357"/>
+                    <a:pt x="5527936" y="1965356"/>
                   </a:lnTo>
                   <a:lnTo>
                     <a:pt x="5541320" y="1976564"/>
@@ -7275,7 +7275,7 @@
                     <a:pt x="5554705" y="1987627"/>
                   </a:lnTo>
                   <a:lnTo>
-                    <a:pt x="5568090" y="1998458"/>
+                    <a:pt x="5568090" y="1998457"/>
                   </a:lnTo>
                   <a:lnTo>
                     <a:pt x="5581475" y="2009061"/>
@@ -7284,7 +7284,7 @@
                     <a:pt x="5594860" y="2019518"/>
                   </a:lnTo>
                   <a:lnTo>
-                    <a:pt x="5608245" y="2029717"/>
+                    <a:pt x="5608245" y="2029716"/>
                   </a:lnTo>
                   <a:lnTo>
                     <a:pt x="5621629" y="2039712"/>
@@ -7383,10 +7383,10 @@
                     <a:pt x="6036559" y="2257144"/>
                   </a:lnTo>
                   <a:lnTo>
-                    <a:pt x="6049944" y="2261607"/>
-                  </a:lnTo>
-                  <a:lnTo>
-                    <a:pt x="6063329" y="2265936"/>
+                    <a:pt x="6049944" y="2261606"/>
+                  </a:lnTo>
+                  <a:lnTo>
+                    <a:pt x="6063329" y="2265935"/>
                   </a:lnTo>
                   <a:lnTo>
                     <a:pt x="6076714" y="2270111"/>
@@ -7401,28 +7401,28 @@
                     <a:pt x="6116868" y="2281971"/>
                   </a:lnTo>
                   <a:lnTo>
-                    <a:pt x="6130253" y="2285712"/>
+                    <a:pt x="6130253" y="2285711"/>
                   </a:lnTo>
                   <a:lnTo>
                     <a:pt x="6143638" y="2289310"/>
                   </a:lnTo>
                   <a:lnTo>
-                    <a:pt x="6157023" y="2292804"/>
+                    <a:pt x="6157023" y="2292803"/>
                   </a:lnTo>
                   <a:lnTo>
                     <a:pt x="6170408" y="2296221"/>
                   </a:lnTo>
                   <a:lnTo>
-                    <a:pt x="6183792" y="2299497"/>
+                    <a:pt x="6183792" y="2299496"/>
                   </a:lnTo>
                   <a:lnTo>
                     <a:pt x="6197177" y="2302687"/>
                   </a:lnTo>
                   <a:lnTo>
-                    <a:pt x="6210562" y="2305808"/>
-                  </a:lnTo>
-                  <a:lnTo>
-                    <a:pt x="6223947" y="2308788"/>
+                    <a:pt x="6210562" y="2305807"/>
+                  </a:lnTo>
+                  <a:lnTo>
+                    <a:pt x="6223947" y="2308787"/>
                   </a:lnTo>
                   <a:lnTo>
                     <a:pt x="6237332" y="2311701"/>
@@ -7509,13 +7509,13 @@
                     <a:pt x="6598722" y="2367307"/>
                   </a:lnTo>
                   <a:lnTo>
-                    <a:pt x="6612107" y="2368936"/>
+                    <a:pt x="6612107" y="2368935"/>
                   </a:lnTo>
                   <a:lnTo>
                     <a:pt x="6625492" y="2370563"/>
                   </a:lnTo>
                   <a:lnTo>
-                    <a:pt x="6638877" y="2372192"/>
+                    <a:pt x="6638877" y="2372191"/>
                   </a:lnTo>
                   <a:lnTo>
                     <a:pt x="6652262" y="2373825"/>
@@ -7539,10 +7539,10 @@
                     <a:pt x="6732571" y="2383834"/>
                   </a:lnTo>
                   <a:lnTo>
-                    <a:pt x="6745955" y="2385553"/>
-                  </a:lnTo>
-                  <a:lnTo>
-                    <a:pt x="6759340" y="2387303"/>
+                    <a:pt x="6745955" y="2385552"/>
+                  </a:lnTo>
+                  <a:lnTo>
+                    <a:pt x="6759340" y="2387302"/>
                   </a:lnTo>
                   <a:lnTo>
                     <a:pt x="6772725" y="2389070"/>
@@ -7551,7 +7551,7 @@
                     <a:pt x="6786110" y="2390855"/>
                   </a:lnTo>
                   <a:lnTo>
-                    <a:pt x="6799495" y="2392678"/>
+                    <a:pt x="6799495" y="2392677"/>
                   </a:lnTo>
                   <a:lnTo>
                     <a:pt x="6812880" y="2394519"/>
@@ -7774,7 +7774,7 @@
                     <a:pt x="776320" y="2365128"/>
                   </a:lnTo>
                   <a:lnTo>
-                    <a:pt x="789705" y="2358086"/>
+                    <a:pt x="789705" y="2358087"/>
                   </a:lnTo>
                   <a:lnTo>
                     <a:pt x="803089" y="2350501"/>
@@ -7792,7 +7792,7 @@
                     <a:pt x="856629" y="2315379"/>
                   </a:lnTo>
                   <a:lnTo>
-                    <a:pt x="870014" y="2305228"/>
+                    <a:pt x="870014" y="2305229"/>
                   </a:lnTo>
                   <a:lnTo>
                     <a:pt x="883398" y="2294578"/>
@@ -7831,7 +7831,7 @@
                     <a:pt x="1030632" y="2143264"/>
                   </a:lnTo>
                   <a:lnTo>
-                    <a:pt x="1044016" y="2126776"/>
+                    <a:pt x="1044016" y="2126777"/>
                   </a:lnTo>
                   <a:lnTo>
                     <a:pt x="1057401" y="2109974"/>
@@ -7849,7 +7849,7 @@
                     <a:pt x="1110941" y="2039831"/>
                   </a:lnTo>
                   <a:lnTo>
-                    <a:pt x="1124325" y="2021683"/>
+                    <a:pt x="1124325" y="2021684"/>
                   </a:lnTo>
                   <a:lnTo>
                     <a:pt x="1137710" y="2003348"/>
@@ -7897,16 +7897,16 @@
                     <a:pt x="1325098" y="1730474"/>
                   </a:lnTo>
                   <a:lnTo>
-                    <a:pt x="1338483" y="1709627"/>
+                    <a:pt x="1338483" y="1709628"/>
                   </a:lnTo>
                   <a:lnTo>
                     <a:pt x="1351868" y="1688526"/>
                   </a:lnTo>
                   <a:lnTo>
-                    <a:pt x="1365252" y="1667149"/>
-                  </a:lnTo>
-                  <a:lnTo>
-                    <a:pt x="1378637" y="1645478"/>
+                    <a:pt x="1365252" y="1667150"/>
+                  </a:lnTo>
+                  <a:lnTo>
+                    <a:pt x="1378637" y="1645479"/>
                   </a:lnTo>
                   <a:lnTo>
                     <a:pt x="1392022" y="1623407"/>
@@ -7924,19 +7924,19 @@
                     <a:pt x="1445561" y="1531095"/>
                   </a:lnTo>
                   <a:lnTo>
-                    <a:pt x="1458946" y="1506799"/>
+                    <a:pt x="1458946" y="1506800"/>
                   </a:lnTo>
                   <a:lnTo>
                     <a:pt x="1472331" y="1482045"/>
                   </a:lnTo>
                   <a:lnTo>
-                    <a:pt x="1485716" y="1456824"/>
-                  </a:lnTo>
-                  <a:lnTo>
-                    <a:pt x="1499101" y="1431130"/>
-                  </a:lnTo>
-                  <a:lnTo>
-                    <a:pt x="1512486" y="1404833"/>
+                    <a:pt x="1485716" y="1456825"/>
+                  </a:lnTo>
+                  <a:lnTo>
+                    <a:pt x="1499101" y="1431131"/>
+                  </a:lnTo>
+                  <a:lnTo>
+                    <a:pt x="1512486" y="1404834"/>
                   </a:lnTo>
                   <a:lnTo>
                     <a:pt x="1525870" y="1377994"/>
@@ -7945,7 +7945,7 @@
                     <a:pt x="1539255" y="1350688"/>
                   </a:lnTo>
                   <a:lnTo>
-                    <a:pt x="1552640" y="1322925"/>
+                    <a:pt x="1552640" y="1322926"/>
                   </a:lnTo>
                   <a:lnTo>
                     <a:pt x="1566025" y="1294690"/>
@@ -7954,7 +7954,7 @@
                     <a:pt x="1579410" y="1265905"/>
                   </a:lnTo>
                   <a:lnTo>
-                    <a:pt x="1592795" y="1236747"/>
+                    <a:pt x="1592795" y="1236748"/>
                   </a:lnTo>
                   <a:lnTo>
                     <a:pt x="1606179" y="1207245"/>
@@ -7981,10 +7981,10 @@
                     <a:pt x="1699873" y="994626"/>
                   </a:lnTo>
                   <a:lnTo>
-                    <a:pt x="1713258" y="964205"/>
-                  </a:lnTo>
-                  <a:lnTo>
-                    <a:pt x="1726643" y="933979"/>
+                    <a:pt x="1713258" y="964206"/>
+                  </a:lnTo>
+                  <a:lnTo>
+                    <a:pt x="1726643" y="933980"/>
                   </a:lnTo>
                   <a:lnTo>
                     <a:pt x="1740028" y="904005"/>
@@ -7993,7 +7993,7 @@
                     <a:pt x="1753413" y="874472"/>
                   </a:lnTo>
                   <a:lnTo>
-                    <a:pt x="1766797" y="845414"/>
+                    <a:pt x="1766797" y="845415"/>
                   </a:lnTo>
                   <a:lnTo>
                     <a:pt x="1780182" y="816855"/>
@@ -8095,13 +8095,13 @@
                     <a:pt x="2208497" y="372716"/>
                   </a:lnTo>
                   <a:lnTo>
-                    <a:pt x="2221882" y="369013"/>
+                    <a:pt x="2221882" y="369014"/>
                   </a:lnTo>
                   <a:lnTo>
                     <a:pt x="2235267" y="365212"/>
                   </a:lnTo>
                   <a:lnTo>
-                    <a:pt x="2248651" y="361263"/>
+                    <a:pt x="2248651" y="361264"/>
                   </a:lnTo>
                   <a:lnTo>
                     <a:pt x="2262036" y="357127"/>
@@ -8119,10 +8119,10 @@
                     <a:pt x="2315576" y="337505"/>
                   </a:lnTo>
                   <a:lnTo>
-                    <a:pt x="2328960" y="331644"/>
-                  </a:lnTo>
-                  <a:lnTo>
-                    <a:pt x="2342345" y="325362"/>
+                    <a:pt x="2328960" y="331645"/>
+                  </a:lnTo>
+                  <a:lnTo>
+                    <a:pt x="2342345" y="325363"/>
                   </a:lnTo>
                   <a:lnTo>
                     <a:pt x="2355730" y="318455"/>
@@ -8272,7 +8272,7 @@
                     <a:pt x="2998202" y="141729"/>
                   </a:lnTo>
                   <a:lnTo>
-                    <a:pt x="3011587" y="160292"/>
+                    <a:pt x="3011587" y="160293"/>
                   </a:lnTo>
                   <a:lnTo>
                     <a:pt x="3024972" y="179539"/>
@@ -8290,7 +8290,7 @@
                     <a:pt x="3078511" y="261416"/>
                   </a:lnTo>
                   <a:lnTo>
-                    <a:pt x="3091896" y="282639"/>
+                    <a:pt x="3091896" y="282640"/>
                   </a:lnTo>
                   <a:lnTo>
                     <a:pt x="3105281" y="303948"/>
@@ -8305,16 +8305,16 @@
                     <a:pt x="3145435" y="367425"/>
                   </a:lnTo>
                   <a:lnTo>
-                    <a:pt x="3158820" y="388114"/>
-                  </a:lnTo>
-                  <a:lnTo>
-                    <a:pt x="3172205" y="408467"/>
-                  </a:lnTo>
-                  <a:lnTo>
-                    <a:pt x="3185590" y="428348"/>
-                  </a:lnTo>
-                  <a:lnTo>
-                    <a:pt x="3198975" y="447618"/>
+                    <a:pt x="3158820" y="388115"/>
+                  </a:lnTo>
+                  <a:lnTo>
+                    <a:pt x="3172205" y="408468"/>
+                  </a:lnTo>
+                  <a:lnTo>
+                    <a:pt x="3185590" y="428349"/>
+                  </a:lnTo>
+                  <a:lnTo>
+                    <a:pt x="3198975" y="447619"/>
                   </a:lnTo>
                   <a:lnTo>
                     <a:pt x="3212359" y="466339"/>
@@ -8323,16 +8323,16 @@
                     <a:pt x="3225744" y="484472"/>
                   </a:lnTo>
                   <a:lnTo>
-                    <a:pt x="3239129" y="501985"/>
-                  </a:lnTo>
-                  <a:lnTo>
-                    <a:pt x="3252514" y="518588"/>
+                    <a:pt x="3239129" y="501986"/>
+                  </a:lnTo>
+                  <a:lnTo>
+                    <a:pt x="3252514" y="518589"/>
                   </a:lnTo>
                   <a:lnTo>
                     <a:pt x="3265899" y="534476"/>
                   </a:lnTo>
                   <a:lnTo>
-                    <a:pt x="3279284" y="549660"/>
+                    <a:pt x="3279284" y="549661"/>
                   </a:lnTo>
                   <a:lnTo>
                     <a:pt x="3292668" y="564136"/>
@@ -8350,10 +8350,10 @@
                     <a:pt x="3346208" y="614130"/>
                   </a:lnTo>
                   <a:lnTo>
-                    <a:pt x="3359593" y="624959"/>
-                  </a:lnTo>
-                  <a:lnTo>
-                    <a:pt x="3372977" y="634984"/>
+                    <a:pt x="3359593" y="624960"/>
+                  </a:lnTo>
+                  <a:lnTo>
+                    <a:pt x="3372977" y="634985"/>
                   </a:lnTo>
                   <a:lnTo>
                     <a:pt x="3386362" y="644490"/>
@@ -8368,7 +8368,7 @@
                     <a:pt x="3426517" y="670312"/>
                   </a:lnTo>
                   <a:lnTo>
-                    <a:pt x="3439902" y="678160"/>
+                    <a:pt x="3439902" y="678161"/>
                   </a:lnTo>
                   <a:lnTo>
                     <a:pt x="3453286" y="685810"/>
@@ -8389,7 +8389,7 @@
                     <a:pt x="3520211" y="723440"/>
                   </a:lnTo>
                   <a:lnTo>
-                    <a:pt x="3533595" y="731372"/>
+                    <a:pt x="3533595" y="731373"/>
                   </a:lnTo>
                   <a:lnTo>
                     <a:pt x="3546980" y="739664"/>
@@ -8416,13 +8416,13 @@
                     <a:pt x="3640674" y="812345"/>
                   </a:lnTo>
                   <a:lnTo>
-                    <a:pt x="3654059" y="825298"/>
+                    <a:pt x="3654059" y="825299"/>
                   </a:lnTo>
                   <a:lnTo>
                     <a:pt x="3667444" y="839116"/>
                   </a:lnTo>
                   <a:lnTo>
-                    <a:pt x="3680829" y="853752"/>
+                    <a:pt x="3680829" y="853753"/>
                   </a:lnTo>
                   <a:lnTo>
                     <a:pt x="3694213" y="869097"/>
@@ -8458,7 +8458,7 @@
                     <a:pt x="3828062" y="1060644"/>
                   </a:lnTo>
                   <a:lnTo>
-                    <a:pt x="3841447" y="1082767"/>
+                    <a:pt x="3841447" y="1082768"/>
                   </a:lnTo>
                   <a:lnTo>
                     <a:pt x="3854831" y="1105303"/>
@@ -8467,7 +8467,7 @@
                     <a:pt x="3868216" y="1128086"/>
                   </a:lnTo>
                   <a:lnTo>
-                    <a:pt x="3881601" y="1151076"/>
+                    <a:pt x="3881601" y="1151077"/>
                   </a:lnTo>
                   <a:lnTo>
                     <a:pt x="3894986" y="1174234"/>
@@ -8533,10 +8533,10 @@
                     <a:pt x="4162683" y="1612563"/>
                   </a:lnTo>
                   <a:lnTo>
-                    <a:pt x="4176067" y="1631823"/>
-                  </a:lnTo>
-                  <a:lnTo>
-                    <a:pt x="4189452" y="1650852"/>
+                    <a:pt x="4176067" y="1631824"/>
+                  </a:lnTo>
+                  <a:lnTo>
+                    <a:pt x="4189452" y="1650853"/>
                   </a:lnTo>
                   <a:lnTo>
                     <a:pt x="4202837" y="1669629"/>
@@ -8548,13 +8548,13 @@
                     <a:pt x="4229607" y="1706454"/>
                   </a:lnTo>
                   <a:lnTo>
-                    <a:pt x="4242992" y="1724575"/>
+                    <a:pt x="4242992" y="1724576"/>
                   </a:lnTo>
                   <a:lnTo>
                     <a:pt x="4256376" y="1742511"/>
                   </a:lnTo>
                   <a:lnTo>
-                    <a:pt x="4269761" y="1760205"/>
+                    <a:pt x="4269761" y="1760206"/>
                   </a:lnTo>
                   <a:lnTo>
                     <a:pt x="4283146" y="1777720"/>
@@ -8671,7 +8671,7 @@
                     <a:pt x="4778385" y="2234163"/>
                   </a:lnTo>
                   <a:lnTo>
-                    <a:pt x="4791770" y="2240595"/>
+                    <a:pt x="4791770" y="2240596"/>
                   </a:lnTo>
                   <a:lnTo>
                     <a:pt x="4805155" y="2246853"/>
@@ -8707,7 +8707,7 @@
                     <a:pt x="4939003" y="2306920"/>
                   </a:lnTo>
                   <a:lnTo>
-                    <a:pt x="4952388" y="2313179"/>
+                    <a:pt x="4952388" y="2313180"/>
                   </a:lnTo>
                   <a:lnTo>
                     <a:pt x="4965773" y="2319548"/>
@@ -8746,7 +8746,7 @@
                     <a:pt x="5113006" y="2400251"/>
                   </a:lnTo>
                   <a:lnTo>
-                    <a:pt x="5126391" y="2408604"/>
+                    <a:pt x="5126391" y="2408605"/>
                   </a:lnTo>
                   <a:lnTo>
                     <a:pt x="5139775" y="2417095"/>
@@ -10877,7 +10877,7 @@
                     <a:pt x="776320" y="2365128"/>
                   </a:lnTo>
                   <a:lnTo>
-                    <a:pt x="789705" y="2358086"/>
+                    <a:pt x="789705" y="2358087"/>
                   </a:lnTo>
                   <a:lnTo>
                     <a:pt x="803089" y="2350501"/>
@@ -10895,7 +10895,7 @@
                     <a:pt x="856629" y="2315379"/>
                   </a:lnTo>
                   <a:lnTo>
-                    <a:pt x="870014" y="2305228"/>
+                    <a:pt x="870014" y="2305229"/>
                   </a:lnTo>
                   <a:lnTo>
                     <a:pt x="883398" y="2294578"/>
@@ -10934,7 +10934,7 @@
                     <a:pt x="1030632" y="2143264"/>
                   </a:lnTo>
                   <a:lnTo>
-                    <a:pt x="1044016" y="2126776"/>
+                    <a:pt x="1044016" y="2126777"/>
                   </a:lnTo>
                   <a:lnTo>
                     <a:pt x="1057401" y="2109974"/>
@@ -10952,7 +10952,7 @@
                     <a:pt x="1110941" y="2039831"/>
                   </a:lnTo>
                   <a:lnTo>
-                    <a:pt x="1124325" y="2021683"/>
+                    <a:pt x="1124325" y="2021684"/>
                   </a:lnTo>
                   <a:lnTo>
                     <a:pt x="1137710" y="2003348"/>
@@ -11000,16 +11000,16 @@
                     <a:pt x="1325098" y="1730474"/>
                   </a:lnTo>
                   <a:lnTo>
-                    <a:pt x="1338483" y="1709627"/>
+                    <a:pt x="1338483" y="1709628"/>
                   </a:lnTo>
                   <a:lnTo>
                     <a:pt x="1351868" y="1688526"/>
                   </a:lnTo>
                   <a:lnTo>
-                    <a:pt x="1365252" y="1667149"/>
-                  </a:lnTo>
-                  <a:lnTo>
-                    <a:pt x="1378637" y="1645478"/>
+                    <a:pt x="1365252" y="1667150"/>
+                  </a:lnTo>
+                  <a:lnTo>
+                    <a:pt x="1378637" y="1645479"/>
                   </a:lnTo>
                   <a:lnTo>
                     <a:pt x="1392022" y="1623407"/>
@@ -11027,19 +11027,19 @@
                     <a:pt x="1445561" y="1531095"/>
                   </a:lnTo>
                   <a:lnTo>
-                    <a:pt x="1458946" y="1506799"/>
+                    <a:pt x="1458946" y="1506800"/>
                   </a:lnTo>
                   <a:lnTo>
                     <a:pt x="1472331" y="1482045"/>
                   </a:lnTo>
                   <a:lnTo>
-                    <a:pt x="1485716" y="1456824"/>
-                  </a:lnTo>
-                  <a:lnTo>
-                    <a:pt x="1499101" y="1431130"/>
-                  </a:lnTo>
-                  <a:lnTo>
-                    <a:pt x="1512486" y="1404833"/>
+                    <a:pt x="1485716" y="1456825"/>
+                  </a:lnTo>
+                  <a:lnTo>
+                    <a:pt x="1499101" y="1431131"/>
+                  </a:lnTo>
+                  <a:lnTo>
+                    <a:pt x="1512486" y="1404834"/>
                   </a:lnTo>
                   <a:lnTo>
                     <a:pt x="1525870" y="1377994"/>
@@ -11048,7 +11048,7 @@
                     <a:pt x="1539255" y="1350688"/>
                   </a:lnTo>
                   <a:lnTo>
-                    <a:pt x="1552640" y="1322925"/>
+                    <a:pt x="1552640" y="1322926"/>
                   </a:lnTo>
                   <a:lnTo>
                     <a:pt x="1566025" y="1294690"/>
@@ -11057,7 +11057,7 @@
                     <a:pt x="1579410" y="1265905"/>
                   </a:lnTo>
                   <a:lnTo>
-                    <a:pt x="1592795" y="1236747"/>
+                    <a:pt x="1592795" y="1236748"/>
                   </a:lnTo>
                   <a:lnTo>
                     <a:pt x="1606179" y="1207245"/>
@@ -11084,10 +11084,10 @@
                     <a:pt x="1699873" y="994626"/>
                   </a:lnTo>
                   <a:lnTo>
-                    <a:pt x="1713258" y="964205"/>
-                  </a:lnTo>
-                  <a:lnTo>
-                    <a:pt x="1726643" y="933979"/>
+                    <a:pt x="1713258" y="964206"/>
+                  </a:lnTo>
+                  <a:lnTo>
+                    <a:pt x="1726643" y="933980"/>
                   </a:lnTo>
                   <a:lnTo>
                     <a:pt x="1740028" y="904005"/>
@@ -11096,7 +11096,7 @@
                     <a:pt x="1753413" y="874472"/>
                   </a:lnTo>
                   <a:lnTo>
-                    <a:pt x="1766797" y="845414"/>
+                    <a:pt x="1766797" y="845415"/>
                   </a:lnTo>
                   <a:lnTo>
                     <a:pt x="1780182" y="816855"/>
@@ -11198,13 +11198,13 @@
                     <a:pt x="2208497" y="372716"/>
                   </a:lnTo>
                   <a:lnTo>
-                    <a:pt x="2221882" y="369013"/>
+                    <a:pt x="2221882" y="369014"/>
                   </a:lnTo>
                   <a:lnTo>
                     <a:pt x="2235267" y="365212"/>
                   </a:lnTo>
                   <a:lnTo>
-                    <a:pt x="2248651" y="361263"/>
+                    <a:pt x="2248651" y="361264"/>
                   </a:lnTo>
                   <a:lnTo>
                     <a:pt x="2262036" y="357127"/>
@@ -11222,10 +11222,10 @@
                     <a:pt x="2315576" y="337505"/>
                   </a:lnTo>
                   <a:lnTo>
-                    <a:pt x="2328960" y="331644"/>
-                  </a:lnTo>
-                  <a:lnTo>
-                    <a:pt x="2342345" y="325362"/>
+                    <a:pt x="2328960" y="331645"/>
+                  </a:lnTo>
+                  <a:lnTo>
+                    <a:pt x="2342345" y="325363"/>
                   </a:lnTo>
                   <a:lnTo>
                     <a:pt x="2355730" y="318455"/>
@@ -11375,7 +11375,7 @@
                     <a:pt x="2998202" y="141729"/>
                   </a:lnTo>
                   <a:lnTo>
-                    <a:pt x="3011587" y="160292"/>
+                    <a:pt x="3011587" y="160293"/>
                   </a:lnTo>
                   <a:lnTo>
                     <a:pt x="3024972" y="179539"/>
@@ -11393,7 +11393,7 @@
                     <a:pt x="3078511" y="261416"/>
                   </a:lnTo>
                   <a:lnTo>
-                    <a:pt x="3091896" y="282639"/>
+                    <a:pt x="3091896" y="282640"/>
                   </a:lnTo>
                   <a:lnTo>
                     <a:pt x="3105281" y="303948"/>
@@ -11408,16 +11408,16 @@
                     <a:pt x="3145435" y="367425"/>
                   </a:lnTo>
                   <a:lnTo>
-                    <a:pt x="3158820" y="388114"/>
-                  </a:lnTo>
-                  <a:lnTo>
-                    <a:pt x="3172205" y="408467"/>
-                  </a:lnTo>
-                  <a:lnTo>
-                    <a:pt x="3185590" y="428348"/>
-                  </a:lnTo>
-                  <a:lnTo>
-                    <a:pt x="3198975" y="447618"/>
+                    <a:pt x="3158820" y="388115"/>
+                  </a:lnTo>
+                  <a:lnTo>
+                    <a:pt x="3172205" y="408468"/>
+                  </a:lnTo>
+                  <a:lnTo>
+                    <a:pt x="3185590" y="428349"/>
+                  </a:lnTo>
+                  <a:lnTo>
+                    <a:pt x="3198975" y="447619"/>
                   </a:lnTo>
                   <a:lnTo>
                     <a:pt x="3212359" y="466339"/>
@@ -11426,16 +11426,16 @@
                     <a:pt x="3225744" y="484472"/>
                   </a:lnTo>
                   <a:lnTo>
-                    <a:pt x="3239129" y="501985"/>
-                  </a:lnTo>
-                  <a:lnTo>
-                    <a:pt x="3252514" y="518588"/>
+                    <a:pt x="3239129" y="501986"/>
+                  </a:lnTo>
+                  <a:lnTo>
+                    <a:pt x="3252514" y="518589"/>
                   </a:lnTo>
                   <a:lnTo>
                     <a:pt x="3265899" y="534476"/>
                   </a:lnTo>
                   <a:lnTo>
-                    <a:pt x="3279284" y="549660"/>
+                    <a:pt x="3279284" y="549661"/>
                   </a:lnTo>
                   <a:lnTo>
                     <a:pt x="3292668" y="564136"/>
@@ -11453,10 +11453,10 @@
                     <a:pt x="3346208" y="614130"/>
                   </a:lnTo>
                   <a:lnTo>
-                    <a:pt x="3359593" y="624959"/>
-                  </a:lnTo>
-                  <a:lnTo>
-                    <a:pt x="3372977" y="634984"/>
+                    <a:pt x="3359593" y="624960"/>
+                  </a:lnTo>
+                  <a:lnTo>
+                    <a:pt x="3372977" y="634985"/>
                   </a:lnTo>
                   <a:lnTo>
                     <a:pt x="3386362" y="644490"/>
@@ -11471,7 +11471,7 @@
                     <a:pt x="3426517" y="670312"/>
                   </a:lnTo>
                   <a:lnTo>
-                    <a:pt x="3439902" y="678160"/>
+                    <a:pt x="3439902" y="678161"/>
                   </a:lnTo>
                   <a:lnTo>
                     <a:pt x="3453286" y="685810"/>
@@ -11492,7 +11492,7 @@
                     <a:pt x="3520211" y="723440"/>
                   </a:lnTo>
                   <a:lnTo>
-                    <a:pt x="3533595" y="731372"/>
+                    <a:pt x="3533595" y="731373"/>
                   </a:lnTo>
                   <a:lnTo>
                     <a:pt x="3546980" y="739664"/>
@@ -11519,13 +11519,13 @@
                     <a:pt x="3640674" y="812345"/>
                   </a:lnTo>
                   <a:lnTo>
-                    <a:pt x="3654059" y="825298"/>
+                    <a:pt x="3654059" y="825299"/>
                   </a:lnTo>
                   <a:lnTo>
                     <a:pt x="3667444" y="839116"/>
                   </a:lnTo>
                   <a:lnTo>
-                    <a:pt x="3680829" y="853752"/>
+                    <a:pt x="3680829" y="853753"/>
                   </a:lnTo>
                   <a:lnTo>
                     <a:pt x="3694213" y="869097"/>
@@ -11561,7 +11561,7 @@
                     <a:pt x="3828062" y="1060644"/>
                   </a:lnTo>
                   <a:lnTo>
-                    <a:pt x="3841447" y="1082767"/>
+                    <a:pt x="3841447" y="1082768"/>
                   </a:lnTo>
                   <a:lnTo>
                     <a:pt x="3854831" y="1105303"/>
@@ -11570,7 +11570,7 @@
                     <a:pt x="3868216" y="1128086"/>
                   </a:lnTo>
                   <a:lnTo>
-                    <a:pt x="3881601" y="1151076"/>
+                    <a:pt x="3881601" y="1151077"/>
                   </a:lnTo>
                   <a:lnTo>
                     <a:pt x="3894986" y="1174234"/>
@@ -11636,10 +11636,10 @@
                     <a:pt x="4162683" y="1612563"/>
                   </a:lnTo>
                   <a:lnTo>
-                    <a:pt x="4176067" y="1631823"/>
-                  </a:lnTo>
-                  <a:lnTo>
-                    <a:pt x="4189452" y="1650852"/>
+                    <a:pt x="4176067" y="1631824"/>
+                  </a:lnTo>
+                  <a:lnTo>
+                    <a:pt x="4189452" y="1650853"/>
                   </a:lnTo>
                   <a:lnTo>
                     <a:pt x="4202837" y="1669629"/>
@@ -11651,13 +11651,13 @@
                     <a:pt x="4229607" y="1706454"/>
                   </a:lnTo>
                   <a:lnTo>
-                    <a:pt x="4242992" y="1724575"/>
+                    <a:pt x="4242992" y="1724576"/>
                   </a:lnTo>
                   <a:lnTo>
                     <a:pt x="4256376" y="1742511"/>
                   </a:lnTo>
                   <a:lnTo>
-                    <a:pt x="4269761" y="1760205"/>
+                    <a:pt x="4269761" y="1760206"/>
                   </a:lnTo>
                   <a:lnTo>
                     <a:pt x="4283146" y="1777720"/>
@@ -11774,7 +11774,7 @@
                     <a:pt x="4778385" y="2234163"/>
                   </a:lnTo>
                   <a:lnTo>
-                    <a:pt x="4791770" y="2240595"/>
+                    <a:pt x="4791770" y="2240596"/>
                   </a:lnTo>
                   <a:lnTo>
                     <a:pt x="4805155" y="2246853"/>
@@ -11810,7 +11810,7 @@
                     <a:pt x="4939003" y="2306920"/>
                   </a:lnTo>
                   <a:lnTo>
-                    <a:pt x="4952388" y="2313179"/>
+                    <a:pt x="4952388" y="2313180"/>
                   </a:lnTo>
                   <a:lnTo>
                     <a:pt x="4965773" y="2319548"/>
@@ -11849,7 +11849,7 @@
                     <a:pt x="5113006" y="2400251"/>
                   </a:lnTo>
                   <a:lnTo>
-                    <a:pt x="5126391" y="2408604"/>
+                    <a:pt x="5126391" y="2408605"/>
                   </a:lnTo>
                   <a:lnTo>
                     <a:pt x="5139775" y="2417095"/>
